--- a/docs/slides/DSPH_Workshop3_Collaboration_on_Projects.pptx
+++ b/docs/slides/DSPH_Workshop3_Collaboration_on_Projects.pptx
@@ -5501,7 +5501,7 @@
                 <a:ea typeface="Futura" pitchFamily="34" charset="-122"/>
                 <a:cs typeface="Futura" pitchFamily="34" charset="-120"/>
               </a:rPr>
-              <a:t>Build a shared Project so a team has one context — files, instructions, and chats — then share it with someone in the room.</a:t>
+              <a:t>Build a shared Project so a team has one context — files, instructions, and chats — then share it with someone else in the session.</a:t>
             </a:r>
             <a:endParaRPr lang="en-US" sz="2025" dirty="0"/>
           </a:p>
